--- a/sd/qa/unit/data/pptx/esilk-theme-font-cyrl.pptx
+++ b/sd/qa/unit/data/pptx/esilk-theme-font-cyrl.pptx
@@ -149,6 +149,14 @@
                 <a:latin typeface="+mn-lt"/>
               </a:rPr>
               <a:t>Қазақ мәтіні</a:t>
+            </a:r>
+          </a:p>
+          <a:p>
+            <a:r>
+              <a:rPr lang="sr-Cyrl">
+                <a:latin typeface="+mn-lt"/>
+              </a:rPr>
+              <a:t>Ћирилица</a:t>
             </a:r>
           </a:p>
         </p:txBody>
